--- a/docs/demos/presentacion/ExamLab-Presentacion-Modelo-Modular.pptx
+++ b/docs/demos/presentacion/ExamLab-Presentacion-Modelo-Modular.pptx
@@ -5257,7 +5257,7 @@
                 </a:solidFill>
                 <a:latin typeface="Calibri"/>
               </a:rPr>
-              <a:t>Modalidad Administrada (+$300/mes): ExamLab opera tu tenant. Disponible desde Pequeña.</a:t>
+              <a:t>Modalidad Administrada (+$300/mes): ExamLab opera tu institución. Disponible desde Pequeña.</a:t>
             </a:r>
           </a:p>
         </p:txBody>
@@ -6345,7 +6345,7 @@
                 </a:solidFill>
                 <a:latin typeface="Calibri"/>
               </a:rPr>
-              <a:t>ExamLab opera el tenant + aislamiento físico. Sin equipo propio del cliente.</a:t>
+              <a:t>ExamLab opera la institución + aislamiento físico. Sin equipo propio del cliente.</a:t>
             </a:r>
           </a:p>
         </p:txBody>
